--- a/public/fun/pack/pptx/reviewpro/보장점검양식프리미엄_34_부모님점검_포레스트골드.pptx
+++ b/public/fun/pack/pptx/reviewpro/보장점검양식프리미엄_34_부모님점검_포레스트골드.pptx
@@ -112,12 +112,12 @@
   <p:extLst>
     <p:ext uri="{521415D9-36F7-43E2-AB2F-B90AF26B5E84}">
       <p14:sectionLst xmlns:p14="http://schemas.microsoft.com/office/powerpoint/2010/main">
-        <p14:section name="시작" id="{88BEE6A2-3CD4-46CB-823C-3E566BB73CCE}">
+        <p14:section name="시작" id="{7BCA997A-08F7-44D1-AE54-1AFD5C779A29}">
           <p14:sldIdLst>
             <p14:sldId id="256"/>
           </p14:sldIdLst>
         </p14:section>
-        <p14:section name="본문" id="{96D8043F-0C5C-442B-A2F2-FDD4259D175B}">
+        <p14:section name="본문" id="{167CC5CF-5887-4ED1-90D8-B37283A94209}">
           <p14:sldIdLst>
             <p14:sldId id="257"/>
             <p14:sldId id="258"/>
@@ -1985,7 +1985,7 @@
             </a:lvl1pPr>
           </a:lstStyle>
           <a:p>
-            <a:fld id="{F7179CF1-DCC8-487F-A299-B7CF51DE9627}" type="slidenum">
+            <a:fld id="{1E453944-30EE-4E1D-AFFD-D1BB79C35AD4}" type="slidenum">
               <a:rPr lang="en-US"/>
               <a:t>‹#›</a:t>
             </a:fld>
@@ -3097,7 +3097,7 @@
             </a:lvl1pPr>
           </a:lstStyle>
           <a:p>
-            <a:fld id="{35349F41-DD77-4896-82DB-A09F15D062F6}" type="slidenum">
+            <a:fld id="{CE5488A4-63BF-4A0C-A4E5-B9A2837EDECD}" type="slidenum">
               <a:rPr lang="en-US"/>
               <a:t>‹#›</a:t>
             </a:fld>
@@ -3781,7 +3781,7 @@
             </a:lvl1pPr>
           </a:lstStyle>
           <a:p>
-            <a:fld id="{CB15E783-DC86-42C2-BFAA-42086F25FCD4}" type="slidenum">
+            <a:fld id="{85A6E429-38F1-487D-909B-0A3FEA39316C}" type="slidenum">
               <a:rPr lang="en-US"/>
               <a:t>‹#›</a:t>
             </a:fld>
@@ -4626,7 +4626,7 @@
           <a:p>
             <a:r>
               <a:rPr lang="ko-KR"/>
-              <a:t>부모님 점검 · 0000. 00. 00</a:t>
+              <a:t>부모님 점검 · 날짜 입력</a:t>
             </a:r>
           </a:p>
           <a:p>
@@ -4717,7 +4717,7 @@
           <a:bodyPr/>
           <a:lstStyle/>
           <a:p>
-            <a:fld id="{4864A907-6A9B-4E9A-9031-667407AC25D5}" type="slidenum">
+            <a:fld id="{C4608B12-43FC-4E84-BA6D-DA4C10B9BF2B}" type="slidenum">
               <a:rPr lang="en-US"/>
               <a:t>‹#›</a:t>
             </a:fld>
@@ -5430,7 +5430,7 @@
           <a:bodyPr/>
           <a:lstStyle/>
           <a:p>
-            <a:fld id="{8A347494-754C-44AB-A016-F518708A4691}" type="slidenum">
+            <a:fld id="{609F0721-6F36-46D3-815D-DBDA35ADDFE9}" type="slidenum">
               <a:rPr lang="en-US"/>
               <a:t>‹#›</a:t>
             </a:fld>
@@ -6936,7 +6936,7 @@
           <a:bodyPr/>
           <a:lstStyle/>
           <a:p>
-            <a:fld id="{60821FE2-F2E6-4FEB-AF12-004B1765DD66}" type="slidenum">
+            <a:fld id="{CEEEC798-A887-4A15-923A-F64A41DF9FD7}" type="slidenum">
               <a:rPr lang="en-US"/>
               <a:t>‹#›</a:t>
             </a:fld>
@@ -8486,7 +8486,7 @@
           <a:bodyPr/>
           <a:lstStyle/>
           <a:p>
-            <a:fld id="{83A2D9C7-3571-4FDC-ABCC-F438909AC69A}" type="slidenum">
+            <a:fld id="{F3758A30-2CAA-4331-ADAF-AB8ED96EAB5E}" type="slidenum">
               <a:rPr lang="en-US"/>
               <a:t>‹#›</a:t>
             </a:fld>
@@ -9414,7 +9414,7 @@
           <a:bodyPr/>
           <a:lstStyle/>
           <a:p>
-            <a:fld id="{DD45C427-9A07-42BF-9362-3669E03885DD}" type="slidenum">
+            <a:fld id="{73767208-E654-4D18-8010-943D0485B29D}" type="slidenum">
               <a:rPr lang="en-US"/>
               <a:t>‹#›</a:t>
             </a:fld>
